--- a/docs/presentaciones/classes/clase-225-privacidad-diferencial-intro-presentacion.pptx
+++ b/docs/presentaciones/classes/clase-225-privacidad-diferencial-intro-presentacion.pptx
@@ -3272,7 +3272,7 @@
                 </a:solidFill>
                 <a:latin typeface="Segoe UI"/>
               </a:rPr>
-              <a:t>Parte: 7 — Ética, Fairness y Privacidad · Fuente: Dwork &amp; Roth, The Algorithmic Foundations of Differential Privacy (2014) caps. 2-3 + Dwork, McSherry, Nissim, Smith (TCC, 2006) Calibrating Noise to Sensitivity.  Duración estimada: 75 min.</a:t>
+              <a:t>Parte: 7 — Ética, Fairness y Privacidad · Fuente: Dwork &amp; Roth, The Algorithmic Foundations of Differential Privacy (2014) caps. 2-3 + Dwork, McSherry, Nissim, Smith (TCC, 2006) Calibrating Noise to Sensitivity.  Duración estimada: 75 min. · Nivel: Intermedio-Avanzado</a:t>
             </a:r>
           </a:p>
         </p:txBody>
@@ -3581,7 +3581,7 @@
                 </a:solidFill>
                 <a:latin typeface="Segoe UI"/>
               </a:rPr>
-              <a:t>Parte: 7 — Ética, Fairness y Privacidad · Fuente: Dwork &amp; Roth, The Algorithmic Foundations of Differential Privacy (2014) caps. 2-3 + Dwork, McSherry, Nissim, Smith (TCC, 2006) Calibrating Noise to Sensitivity.  Duración estimada: 75 min.</a:t>
+              <a:t>Parte: 7 — Ética, Fairness y Privacidad · Fuente: Dwork &amp; Roth, The Algorithmic Foundations of Differential Privacy (2014) caps. 2-3 + Dwork, McSherry, Nissim, Smith (TCC, 2006) Calibrating Noise to Sensitivity.  Duración estimada: 75 min. · Nivel: Intermedio-Avanzado</a:t>
             </a:r>
           </a:p>
         </p:txBody>
@@ -4823,7 +4823,7 @@
                 </a:solidFill>
                 <a:latin typeface="Segoe UI"/>
               </a:rPr>
-              <a:t>Sintético: dataset de salarios n=10_000. Requiere: pip install numpy pandas scikit-learn.</a:t>
+              <a:t>Privacidad diferencial = añadir ruido calibrado a la salida de una consulta para que el resultado no dependa de ningún individuo concreto. Formalmente: si sacás a una persona del dataset, la distribución de la respuesta casi no cambia — la razón entre ambas</a:t>
             </a:r>
           </a:p>
         </p:txBody>
